--- a/Projects/Module08b-WorkingStateAndCompaction/Module08b - Context Management - Working State and Compaction.pptx
+++ b/Projects/Module08b-WorkingStateAndCompaction/Module08b - Context Management - Working State and Compaction.pptx
@@ -508,7 +508,7 @@
           <a:p>
             <a:r>
               <a:rPr lang="en-US" dirty="0"/>
-              <a:t>Ships as part of Phase 2 Capstone — Planning Agent (v0.2). Currency note: AgentSession does not expose its messages as a property — it has StateBag and GetService, and nothing else. History is reached through the extension methods TryGetInMemoryChatHistory(out List&lt;ChatMessage&gt;) and SetInMemoryChatHistory(...) in Microsoft.Agents.AI. MAF 1.20.0 also ships a whole Microsoft.Agents.AI.Compaction namespace with ready-made strategies; MiniCode does not use it, because its index type requires a Microsoft.ML.Tokenizers dependency and because configuring a strategy would teach configuration rather than the decision this Module is about.</a:t>
+              <a:t>Ships as part of Phase 2 Capstone — Planning Agent (v0.2). Currency note: AgentSession does not expose its messages as a property — it has StateBag and GetService, and nothing else. History is reached through the extension methods TryGetInMemoryChatHistory(out List&lt;ChatMessage&gt;) and SetInMemoryChatHistory(...) in Microsoft.Agents.AI. MAF 1.22.0 also ships a whole Microsoft.Agents.AI.Compaction namespace with ready-made strategies; MiniCode does not use it, because its index type requires a Microsoft.ML.Tokenizers dependency and because configuring a strategy would teach configuration rather than the decision this Module is about.</a:t>
             </a:r>
             <a:endParaRPr lang="en-US" dirty="0"/>
           </a:p>
